--- a/10-Knowledge-Products/KP2-GIF/videos/module_4/en/decks/KP2_M4_Deck_v0.1.pptx
+++ b/10-Knowledge-Products/KP2-GIF/videos/module_4/en/decks/KP2_M4_Deck_v0.1.pptx
@@ -17143,7 +17143,7 @@
                 </a:solidFill>
                 <a:latin typeface="Arial"/>
               </a:rPr>
-              <a:t>KP2 · MODULE 4 · VIDEO 4.2</a:t>
+              <a:t>MODULE 4 · VIDEO 4.2</a:t>
             </a:r>
           </a:p>
         </p:txBody>
@@ -20025,7 +20025,7 @@
                 </a:solidFill>
                 <a:latin typeface="Arial"/>
               </a:rPr>
-              <a:t>KP2 · MODULE 4 · VIDEO 4.3</a:t>
+              <a:t>MODULE 4 · VIDEO 4.3</a:t>
             </a:r>
           </a:p>
         </p:txBody>
@@ -22832,7 +22832,7 @@
                 </a:solidFill>
                 <a:latin typeface="Arial"/>
               </a:rPr>
-              <a:t>KP2 · MODULE 4 · VIDEO 4.4</a:t>
+              <a:t>MODULE 4 · VIDEO 4.4</a:t>
             </a:r>
           </a:p>
         </p:txBody>
@@ -23230,7 +23230,7 @@
                 </a:solidFill>
                 <a:latin typeface="Arial"/>
               </a:rPr>
-              <a:t>KP2 · MODULE 4 · VIDEO 4.1</a:t>
+              <a:t>MODULE 4 · VIDEO 4.1</a:t>
             </a:r>
           </a:p>
         </p:txBody>
@@ -25827,7 +25827,7 @@
                 </a:solidFill>
                 <a:latin typeface="Arial"/>
               </a:rPr>
-              <a:t>KP2 · MODULE 4 · VIDEO 4.5</a:t>
+              <a:t>MODULE 4 · VIDEO 4.5</a:t>
             </a:r>
           </a:p>
         </p:txBody>
@@ -28894,7 +28894,7 @@
                 </a:solidFill>
                 <a:latin typeface="Arial"/>
               </a:rPr>
-              <a:t>KP2 · MODULE 4 · VIDEO 4.6</a:t>
+              <a:t>MODULE 4 · VIDEO 4.6</a:t>
             </a:r>
           </a:p>
         </p:txBody>
@@ -32732,7 +32732,7 @@
                 </a:solidFill>
                 <a:latin typeface="Arial"/>
               </a:rPr>
-              <a:t>KP2 · MODULE 4 · VIDEO 4.7</a:t>
+              <a:t>MODULE 4 · VIDEO 4.7</a:t>
             </a:r>
           </a:p>
         </p:txBody>
@@ -35542,7 +35542,7 @@
                 </a:solidFill>
                 <a:latin typeface="Arial"/>
               </a:rPr>
-              <a:t>KP2 · MODULE 4 · VIDEO 4.8</a:t>
+              <a:t>MODULE 4 · VIDEO 4.8</a:t>
             </a:r>
           </a:p>
         </p:txBody>
